--- a/Ch18_Early_Eighteenth.pptx
+++ b/Ch18_Early_Eighteenth.pptx
@@ -6779,7 +6779,7 @@
                 <a:ea typeface="Calibri" pitchFamily="34" charset="-122"/>
                 <a:cs typeface="Calibri" pitchFamily="34" charset="-120"/>
               </a:rPr>
-              <a:t>youtu.be/xaJm4OPxp-w</a:t>
+              <a:t>youtu.be/BL-KzcwHDbY</a:t>
             </a:r>
             <a:endParaRPr lang="en-US" sz="1400" dirty="0"/>
           </a:p>
@@ -6868,7 +6868,7 @@
                 <a:ea typeface="Calibri" pitchFamily="34" charset="-122"/>
                 <a:cs typeface="Calibri" pitchFamily="34" charset="-120"/>
               </a:rPr>
-              <a:t>youtu.be/uy7CSAM_qRo</a:t>
+              <a:t>youtu.be/Gn5z0Hb-bb8</a:t>
             </a:r>
             <a:endParaRPr lang="en-US" sz="1400" dirty="0"/>
           </a:p>
@@ -6917,7 +6917,7 @@
                 <a:ea typeface="Calibri" pitchFamily="34" charset="-122"/>
                 <a:cs typeface="Calibri" pitchFamily="34" charset="-120"/>
               </a:rPr>
-              <a:t>youtu.be/AOe08v6FIxU</a:t>
+              <a:t>youtu.be/86rY74qyVSA</a:t>
             </a:r>
             <a:endParaRPr lang="en-US" sz="1400" dirty="0"/>
           </a:p>
